--- a/Презентация ООАП (защита).pptx
+++ b/Презентация ООАП (защита).pptx
@@ -13,18 +13,17 @@
     <p:sldId id="272" r:id="rId7"/>
     <p:sldId id="263" r:id="rId8"/>
     <p:sldId id="265" r:id="rId9"/>
-    <p:sldId id="270" r:id="rId10"/>
-    <p:sldId id="262" r:id="rId11"/>
-    <p:sldId id="266" r:id="rId12"/>
-    <p:sldId id="267" r:id="rId13"/>
-    <p:sldId id="271" r:id="rId14"/>
-    <p:sldId id="268" r:id="rId15"/>
-    <p:sldId id="269" r:id="rId16"/>
-    <p:sldId id="274" r:id="rId17"/>
-    <p:sldId id="277" r:id="rId18"/>
-    <p:sldId id="275" r:id="rId19"/>
-    <p:sldId id="276" r:id="rId20"/>
-    <p:sldId id="264" r:id="rId21"/>
+    <p:sldId id="262" r:id="rId10"/>
+    <p:sldId id="266" r:id="rId11"/>
+    <p:sldId id="267" r:id="rId12"/>
+    <p:sldId id="271" r:id="rId13"/>
+    <p:sldId id="268" r:id="rId14"/>
+    <p:sldId id="269" r:id="rId15"/>
+    <p:sldId id="274" r:id="rId16"/>
+    <p:sldId id="277" r:id="rId17"/>
+    <p:sldId id="275" r:id="rId18"/>
+    <p:sldId id="276" r:id="rId19"/>
+    <p:sldId id="264" r:id="rId20"/>
   </p:sldIdLst>
   <p:sldSz cx="12192000" cy="6858000"/>
   <p:notesSz cx="6858000" cy="9144000"/>
@@ -1349,7 +1348,7 @@
           <a:p>
             <a:fld id="{D3D22832-4BA6-4D93-84B4-2F37F4F97A19}" type="datetimeFigureOut">
               <a:rPr lang="ru-RU" smtClean="0"/>
-              <a:t>07.12.2025</a:t>
+              <a:t>08.12.2025</a:t>
             </a:fld>
             <a:endParaRPr lang="ru-RU"/>
           </a:p>
@@ -1594,7 +1593,7 @@
           <a:p>
             <a:fld id="{D3D22832-4BA6-4D93-84B4-2F37F4F97A19}" type="datetimeFigureOut">
               <a:rPr lang="ru-RU" smtClean="0"/>
-              <a:t>07.12.2025</a:t>
+              <a:t>08.12.2025</a:t>
             </a:fld>
             <a:endParaRPr lang="ru-RU"/>
           </a:p>
@@ -1774,7 +1773,7 @@
           <a:p>
             <a:fld id="{D3D22832-4BA6-4D93-84B4-2F37F4F97A19}" type="datetimeFigureOut">
               <a:rPr lang="ru-RU" smtClean="0"/>
-              <a:t>07.12.2025</a:t>
+              <a:t>08.12.2025</a:t>
             </a:fld>
             <a:endParaRPr lang="ru-RU"/>
           </a:p>
@@ -1944,7 +1943,7 @@
           <a:p>
             <a:fld id="{D3D22832-4BA6-4D93-84B4-2F37F4F97A19}" type="datetimeFigureOut">
               <a:rPr lang="ru-RU" smtClean="0"/>
-              <a:t>07.12.2025</a:t>
+              <a:t>08.12.2025</a:t>
             </a:fld>
             <a:endParaRPr lang="ru-RU"/>
           </a:p>
@@ -2220,7 +2219,7 @@
           <a:p>
             <a:fld id="{D3D22832-4BA6-4D93-84B4-2F37F4F97A19}" type="datetimeFigureOut">
               <a:rPr lang="ru-RU" smtClean="0"/>
-              <a:t>07.12.2025</a:t>
+              <a:t>08.12.2025</a:t>
             </a:fld>
             <a:endParaRPr lang="ru-RU"/>
           </a:p>
@@ -3421,7 +3420,7 @@
           <a:p>
             <a:fld id="{D3D22832-4BA6-4D93-84B4-2F37F4F97A19}" type="datetimeFigureOut">
               <a:rPr lang="ru-RU" smtClean="0"/>
-              <a:t>07.12.2025</a:t>
+              <a:t>08.12.2025</a:t>
             </a:fld>
             <a:endParaRPr lang="ru-RU"/>
           </a:p>
@@ -3811,7 +3810,7 @@
           <a:p>
             <a:fld id="{D3D22832-4BA6-4D93-84B4-2F37F4F97A19}" type="datetimeFigureOut">
               <a:rPr lang="ru-RU" smtClean="0"/>
-              <a:t>07.12.2025</a:t>
+              <a:t>08.12.2025</a:t>
             </a:fld>
             <a:endParaRPr lang="ru-RU"/>
           </a:p>
@@ -3934,7 +3933,7 @@
           <a:p>
             <a:fld id="{D3D22832-4BA6-4D93-84B4-2F37F4F97A19}" type="datetimeFigureOut">
               <a:rPr lang="ru-RU" smtClean="0"/>
-              <a:t>07.12.2025</a:t>
+              <a:t>08.12.2025</a:t>
             </a:fld>
             <a:endParaRPr lang="ru-RU"/>
           </a:p>
@@ -4029,7 +4028,7 @@
           <a:p>
             <a:fld id="{D3D22832-4BA6-4D93-84B4-2F37F4F97A19}" type="datetimeFigureOut">
               <a:rPr lang="ru-RU" smtClean="0"/>
-              <a:t>07.12.2025</a:t>
+              <a:t>08.12.2025</a:t>
             </a:fld>
             <a:endParaRPr lang="ru-RU"/>
           </a:p>
@@ -4792,7 +4791,7 @@
           <a:p>
             <a:fld id="{D3D22832-4BA6-4D93-84B4-2F37F4F97A19}" type="datetimeFigureOut">
               <a:rPr lang="ru-RU" smtClean="0"/>
-              <a:t>07.12.2025</a:t>
+              <a:t>08.12.2025</a:t>
             </a:fld>
             <a:endParaRPr lang="ru-RU"/>
           </a:p>
@@ -5632,7 +5631,7 @@
           <a:p>
             <a:fld id="{D3D22832-4BA6-4D93-84B4-2F37F4F97A19}" type="datetimeFigureOut">
               <a:rPr lang="ru-RU" smtClean="0"/>
-              <a:t>07.12.2025</a:t>
+              <a:t>08.12.2025</a:t>
             </a:fld>
             <a:endParaRPr lang="ru-RU"/>
           </a:p>
@@ -5859,7 +5858,7 @@
           <a:p>
             <a:fld id="{D3D22832-4BA6-4D93-84B4-2F37F4F97A19}" type="datetimeFigureOut">
               <a:rPr lang="ru-RU" smtClean="0"/>
-              <a:t>07.12.2025</a:t>
+              <a:t>08.12.2025</a:t>
             </a:fld>
             <a:endParaRPr lang="ru-RU"/>
           </a:p>
@@ -6992,132 +6991,6 @@
         </p:nvSpPr>
         <p:spPr>
           <a:xfrm>
-            <a:off x="1251678" y="207665"/>
-            <a:ext cx="10178322" cy="605167"/>
-          </a:xfrm>
-        </p:spPr>
-        <p:txBody>
-          <a:bodyPr>
-            <a:normAutofit fontScale="90000"/>
-          </a:bodyPr>
-          <a:lstStyle/>
-          <a:p>
-            <a:pPr algn="ctr"/>
-            <a:r>
-              <a:rPr lang="ru-RU" sz="3200" dirty="0" err="1"/>
-              <a:t>ДиаграммА</a:t>
-            </a:r>
-            <a:r>
-              <a:rPr lang="ru-RU" sz="3200" dirty="0"/>
-              <a:t> вариантов использования</a:t>
-            </a:r>
-            <a:br>
-              <a:rPr lang="ru-RU" sz="3200" dirty="0"/>
-            </a:br>
-            <a:r>
-              <a:rPr lang="ru-RU" sz="3200" dirty="0"/>
-              <a:t>(для стоматологии «улыбка»)</a:t>
-            </a:r>
-          </a:p>
-        </p:txBody>
-      </p:sp>
-      <p:sp>
-        <p:nvSpPr>
-          <p:cNvPr id="5" name="Объект 4">
-            <a:extLst>
-              <a:ext uri="{FF2B5EF4-FFF2-40B4-BE49-F238E27FC236}">
-                <a16:creationId xmlns:a16="http://schemas.microsoft.com/office/drawing/2014/main" id="{4A766661-C17E-534F-19C9-E8A7DC96E63A}"/>
-              </a:ext>
-            </a:extLst>
-          </p:cNvPr>
-          <p:cNvSpPr>
-            <a:spLocks noGrp="1"/>
-          </p:cNvSpPr>
-          <p:nvPr>
-            <p:ph idx="1"/>
-          </p:nvPr>
-        </p:nvSpPr>
-        <p:spPr/>
-        <p:txBody>
-          <a:bodyPr/>
-          <a:lstStyle/>
-          <a:p>
-            <a:endParaRPr lang="ru-RU"/>
-          </a:p>
-        </p:txBody>
-      </p:sp>
-      <p:pic>
-        <p:nvPicPr>
-          <p:cNvPr id="7" name="Рисунок 6">
-            <a:extLst>
-              <a:ext uri="{FF2B5EF4-FFF2-40B4-BE49-F238E27FC236}">
-                <a16:creationId xmlns:a16="http://schemas.microsoft.com/office/drawing/2014/main" id="{5042054F-3244-D456-E693-A030915CD542}"/>
-              </a:ext>
-            </a:extLst>
-          </p:cNvPr>
-          <p:cNvPicPr>
-            <a:picLocks noChangeAspect="1"/>
-          </p:cNvPicPr>
-          <p:nvPr/>
-        </p:nvPicPr>
-        <p:blipFill>
-          <a:blip r:embed="rId2"/>
-          <a:stretch>
-            <a:fillRect/>
-          </a:stretch>
-        </p:blipFill>
-        <p:spPr>
-          <a:xfrm>
-            <a:off x="1524210" y="1339005"/>
-            <a:ext cx="9633257" cy="5061795"/>
-          </a:xfrm>
-          <a:prstGeom prst="rect">
-            <a:avLst/>
-          </a:prstGeom>
-        </p:spPr>
-      </p:pic>
-    </p:spTree>
-    <p:extLst>
-      <p:ext uri="{BB962C8B-B14F-4D97-AF65-F5344CB8AC3E}">
-        <p14:creationId xmlns:p14="http://schemas.microsoft.com/office/powerpoint/2010/main" val="556189797"/>
-      </p:ext>
-    </p:extLst>
-  </p:cSld>
-  <p:clrMapOvr>
-    <a:masterClrMapping/>
-  </p:clrMapOvr>
-</p:sld>
-</file>
-
-<file path=ppt/slides/slide11.xml><?xml version="1.0" encoding="utf-8"?>
-<p:sld xmlns:a="http://schemas.openxmlformats.org/drawingml/2006/main" xmlns:r="http://schemas.openxmlformats.org/officeDocument/2006/relationships" xmlns:p="http://schemas.openxmlformats.org/presentationml/2006/main">
-  <p:cSld>
-    <p:spTree>
-      <p:nvGrpSpPr>
-        <p:cNvPr id="1" name=""/>
-        <p:cNvGrpSpPr/>
-        <p:nvPr/>
-      </p:nvGrpSpPr>
-      <p:grpSpPr>
-        <a:xfrm>
-          <a:off x="0" y="0"/>
-          <a:ext cx="0" cy="0"/>
-          <a:chOff x="0" y="0"/>
-          <a:chExt cx="0" cy="0"/>
-        </a:xfrm>
-      </p:grpSpPr>
-      <p:sp>
-        <p:nvSpPr>
-          <p:cNvPr id="2" name="Заголовок 1"/>
-          <p:cNvSpPr>
-            <a:spLocks noGrp="1"/>
-          </p:cNvSpPr>
-          <p:nvPr>
-            <p:ph type="title"/>
-          </p:nvPr>
-        </p:nvSpPr>
-        <p:spPr>
-          <a:xfrm>
             <a:off x="1108253" y="1074082"/>
             <a:ext cx="10178322" cy="605167"/>
           </a:xfrm>
@@ -7224,7 +7097,7 @@
 </p:sld>
 </file>
 
-<file path=ppt/slides/slide12.xml><?xml version="1.0" encoding="utf-8"?>
+<file path=ppt/slides/slide11.xml><?xml version="1.0" encoding="utf-8"?>
 <p:sld xmlns:a="http://schemas.openxmlformats.org/drawingml/2006/main" xmlns:r="http://schemas.openxmlformats.org/officeDocument/2006/relationships" xmlns:p="http://schemas.openxmlformats.org/presentationml/2006/main">
   <p:cSld>
     <p:spTree>
@@ -7339,7 +7212,7 @@
 </p:sld>
 </file>
 
-<file path=ppt/slides/slide13.xml><?xml version="1.0" encoding="utf-8"?>
+<file path=ppt/slides/slide12.xml><?xml version="1.0" encoding="utf-8"?>
 <p:sld xmlns:a="http://schemas.openxmlformats.org/drawingml/2006/main" xmlns:r="http://schemas.openxmlformats.org/officeDocument/2006/relationships" xmlns:p="http://schemas.openxmlformats.org/presentationml/2006/main">
   <p:cSld>
     <p:spTree>
@@ -7454,7 +7327,7 @@
 </p:sld>
 </file>
 
-<file path=ppt/slides/slide14.xml><?xml version="1.0" encoding="utf-8"?>
+<file path=ppt/slides/slide13.xml><?xml version="1.0" encoding="utf-8"?>
 <p:sld xmlns:a="http://schemas.openxmlformats.org/drawingml/2006/main" xmlns:r="http://schemas.openxmlformats.org/officeDocument/2006/relationships" xmlns:p="http://schemas.openxmlformats.org/presentationml/2006/main">
   <p:cSld>
     <p:spTree>
@@ -7584,7 +7457,7 @@
 </p:sld>
 </file>
 
-<file path=ppt/slides/slide15.xml><?xml version="1.0" encoding="utf-8"?>
+<file path=ppt/slides/slide14.xml><?xml version="1.0" encoding="utf-8"?>
 <p:sld xmlns:a="http://schemas.openxmlformats.org/drawingml/2006/main" xmlns:r="http://schemas.openxmlformats.org/officeDocument/2006/relationships" xmlns:p="http://schemas.openxmlformats.org/presentationml/2006/main">
   <p:cSld>
     <p:spTree>
@@ -7714,7 +7587,7 @@
 </p:sld>
 </file>
 
-<file path=ppt/slides/slide16.xml><?xml version="1.0" encoding="utf-8"?>
+<file path=ppt/slides/slide15.xml><?xml version="1.0" encoding="utf-8"?>
 <p:sld xmlns:a="http://schemas.openxmlformats.org/drawingml/2006/main" xmlns:r="http://schemas.openxmlformats.org/officeDocument/2006/relationships" xmlns:p="http://schemas.openxmlformats.org/presentationml/2006/main">
   <p:cSld>
     <p:spTree>
@@ -7856,7 +7729,7 @@
 </p:sld>
 </file>
 
-<file path=ppt/slides/slide17.xml><?xml version="1.0" encoding="utf-8"?>
+<file path=ppt/slides/slide16.xml><?xml version="1.0" encoding="utf-8"?>
 <p:sld xmlns:a="http://schemas.openxmlformats.org/drawingml/2006/main" xmlns:r="http://schemas.openxmlformats.org/officeDocument/2006/relationships" xmlns:p="http://schemas.openxmlformats.org/presentationml/2006/main">
   <p:cSld>
     <p:spTree>
@@ -7930,7 +7803,7 @@
         <p:spPr>
           <a:xfrm>
             <a:off x="1106917" y="1337182"/>
-            <a:ext cx="4055018" cy="538609"/>
+            <a:ext cx="6892024" cy="538609"/>
           </a:xfrm>
           <a:prstGeom prst="rect">
             <a:avLst/>
@@ -7950,17 +7823,17 @@
                 </a:solidFill>
                 <a:latin typeface="+mj-lt"/>
               </a:rPr>
-              <a:t>СОСТОЯНИЕ ЗАГРУЗЧИКА</a:t>
+              <a:t>СОСТОЯНИЕ Доктора другой стоматологии</a:t>
             </a:r>
           </a:p>
         </p:txBody>
       </p:sp>
       <p:pic>
         <p:nvPicPr>
-          <p:cNvPr id="5" name="Рисунок 4" descr="Изображение выглядит как текст, диаграмма, снимок экрана, линия">
+          <p:cNvPr id="7" name="Рисунок 6">
             <a:extLst>
               <a:ext uri="{FF2B5EF4-FFF2-40B4-BE49-F238E27FC236}">
-                <a16:creationId xmlns:a16="http://schemas.microsoft.com/office/drawing/2014/main" id="{B3E330FA-8E6C-8C2A-3C58-7ABA651EBCBC}"/>
+                <a16:creationId xmlns:a16="http://schemas.microsoft.com/office/drawing/2014/main" id="{E2471FDD-98DB-44C8-889E-273DE3069E4C}"/>
               </a:ext>
             </a:extLst>
           </p:cNvPr>
@@ -7970,15 +7843,21 @@
           <p:nvPr/>
         </p:nvPicPr>
         <p:blipFill>
-          <a:blip r:embed="rId2"/>
+          <a:blip r:embed="rId2">
+            <a:extLst>
+              <a:ext uri="{28A0092B-C50C-407E-A947-70E740481C1C}">
+                <a14:useLocalDpi xmlns:a14="http://schemas.microsoft.com/office/drawing/2010/main" val="0"/>
+              </a:ext>
+            </a:extLst>
+          </a:blip>
           <a:stretch>
             <a:fillRect/>
           </a:stretch>
         </p:blipFill>
         <p:spPr>
           <a:xfrm>
-            <a:off x="1052054" y="2282153"/>
-            <a:ext cx="10577570" cy="3902337"/>
+            <a:off x="1449307" y="2058934"/>
+            <a:ext cx="9980693" cy="4135920"/>
           </a:xfrm>
           <a:prstGeom prst="rect">
             <a:avLst/>
@@ -7998,7 +7877,7 @@
 </p:sld>
 </file>
 
-<file path=ppt/slides/slide18.xml><?xml version="1.0" encoding="utf-8"?>
+<file path=ppt/slides/slide17.xml><?xml version="1.0" encoding="utf-8"?>
 <p:sld xmlns:a="http://schemas.openxmlformats.org/drawingml/2006/main" xmlns:r="http://schemas.openxmlformats.org/officeDocument/2006/relationships" xmlns:p="http://schemas.openxmlformats.org/presentationml/2006/main">
   <p:cSld>
     <p:spTree>
@@ -8104,7 +7983,7 @@
 </p:sld>
 </file>
 
-<file path=ppt/slides/slide19.xml><?xml version="1.0" encoding="utf-8"?>
+<file path=ppt/slides/slide18.xml><?xml version="1.0" encoding="utf-8"?>
 <p:sld xmlns:a="http://schemas.openxmlformats.org/drawingml/2006/main" xmlns:r="http://schemas.openxmlformats.org/officeDocument/2006/relationships" xmlns:p="http://schemas.openxmlformats.org/presentationml/2006/main">
   <p:cSld>
     <p:spTree>
@@ -8245,165 +8124,7 @@
 </p:sld>
 </file>
 
-<file path=ppt/slides/slide2.xml><?xml version="1.0" encoding="utf-8"?>
-<p:sld xmlns:a="http://schemas.openxmlformats.org/drawingml/2006/main" xmlns:r="http://schemas.openxmlformats.org/officeDocument/2006/relationships" xmlns:p="http://schemas.openxmlformats.org/presentationml/2006/main">
-  <p:cSld>
-    <p:spTree>
-      <p:nvGrpSpPr>
-        <p:cNvPr id="1" name=""/>
-        <p:cNvGrpSpPr/>
-        <p:nvPr/>
-      </p:nvGrpSpPr>
-      <p:grpSpPr>
-        <a:xfrm>
-          <a:off x="0" y="0"/>
-          <a:ext cx="0" cy="0"/>
-          <a:chOff x="0" y="0"/>
-          <a:chExt cx="0" cy="0"/>
-        </a:xfrm>
-      </p:grpSpPr>
-      <p:sp>
-        <p:nvSpPr>
-          <p:cNvPr id="2" name="Заголовок 1"/>
-          <p:cNvSpPr>
-            <a:spLocks noGrp="1"/>
-          </p:cNvSpPr>
-          <p:nvPr>
-            <p:ph type="title"/>
-          </p:nvPr>
-        </p:nvSpPr>
-        <p:spPr>
-          <a:xfrm>
-            <a:off x="1006839" y="208649"/>
-            <a:ext cx="10178322" cy="696607"/>
-          </a:xfrm>
-        </p:spPr>
-        <p:txBody>
-          <a:bodyPr>
-            <a:normAutofit fontScale="90000"/>
-          </a:bodyPr>
-          <a:lstStyle/>
-          <a:p>
-            <a:r>
-              <a:rPr lang="ru-RU" sz="3200" dirty="0"/>
-              <a:t>ЛАБОРАТОРНАЯ №1</a:t>
-            </a:r>
-            <a:br>
-              <a:rPr lang="ru-RU" sz="3200" dirty="0"/>
-            </a:br>
-            <a:endParaRPr lang="ru-RU" sz="3200" dirty="0"/>
-          </a:p>
-        </p:txBody>
-      </p:sp>
-      <p:sp>
-        <p:nvSpPr>
-          <p:cNvPr id="3" name="TextBox 2">
-            <a:extLst>
-              <a:ext uri="{FF2B5EF4-FFF2-40B4-BE49-F238E27FC236}">
-                <a16:creationId xmlns:a16="http://schemas.microsoft.com/office/drawing/2014/main" id="{1FF9C8B5-E65A-AC95-74D0-8D96BC5C953F}"/>
-              </a:ext>
-            </a:extLst>
-          </p:cNvPr>
-          <p:cNvSpPr txBox="1"/>
-          <p:nvPr/>
-        </p:nvSpPr>
-        <p:spPr>
-          <a:xfrm>
-            <a:off x="3183685" y="868743"/>
-            <a:ext cx="7167716" cy="538609"/>
-          </a:xfrm>
-          <a:prstGeom prst="rect">
-            <a:avLst/>
-          </a:prstGeom>
-          <a:noFill/>
-        </p:spPr>
-        <p:txBody>
-          <a:bodyPr wrap="square" rtlCol="0">
-            <a:spAutoFit/>
-          </a:bodyPr>
-          <a:lstStyle/>
-          <a:p>
-            <a:r>
-              <a:rPr lang="ru-RU" sz="2900" dirty="0">
-                <a:solidFill>
-                  <a:schemeClr val="tx2"/>
-                </a:solidFill>
-                <a:latin typeface="+mj-lt"/>
-              </a:rPr>
-              <a:t>Диаграмма модели предметной области</a:t>
-            </a:r>
-          </a:p>
-        </p:txBody>
-      </p:sp>
-      <p:sp>
-        <p:nvSpPr>
-          <p:cNvPr id="6" name="Объект 5">
-            <a:extLst>
-              <a:ext uri="{FF2B5EF4-FFF2-40B4-BE49-F238E27FC236}">
-                <a16:creationId xmlns:a16="http://schemas.microsoft.com/office/drawing/2014/main" id="{B18EEEB2-AE78-BC4F-CDEF-2C67C7F2C86C}"/>
-              </a:ext>
-            </a:extLst>
-          </p:cNvPr>
-          <p:cNvSpPr>
-            <a:spLocks noGrp="1"/>
-          </p:cNvSpPr>
-          <p:nvPr>
-            <p:ph idx="1"/>
-          </p:nvPr>
-        </p:nvSpPr>
-        <p:spPr/>
-        <p:txBody>
-          <a:bodyPr/>
-          <a:lstStyle/>
-          <a:p>
-            <a:endParaRPr lang="ru-RU"/>
-          </a:p>
-        </p:txBody>
-      </p:sp>
-      <p:pic>
-        <p:nvPicPr>
-          <p:cNvPr id="8" name="Рисунок 7">
-            <a:extLst>
-              <a:ext uri="{FF2B5EF4-FFF2-40B4-BE49-F238E27FC236}">
-                <a16:creationId xmlns:a16="http://schemas.microsoft.com/office/drawing/2014/main" id="{783AC3D1-2754-5C48-2CA9-8971B2B5E4BE}"/>
-              </a:ext>
-            </a:extLst>
-          </p:cNvPr>
-          <p:cNvPicPr>
-            <a:picLocks noChangeAspect="1"/>
-          </p:cNvPicPr>
-          <p:nvPr/>
-        </p:nvPicPr>
-        <p:blipFill>
-          <a:blip r:embed="rId2"/>
-          <a:stretch>
-            <a:fillRect/>
-          </a:stretch>
-        </p:blipFill>
-        <p:spPr>
-          <a:xfrm>
-            <a:off x="1663411" y="1407352"/>
-            <a:ext cx="9354856" cy="5010849"/>
-          </a:xfrm>
-          <a:prstGeom prst="rect">
-            <a:avLst/>
-          </a:prstGeom>
-        </p:spPr>
-      </p:pic>
-    </p:spTree>
-    <p:extLst>
-      <p:ext uri="{BB962C8B-B14F-4D97-AF65-F5344CB8AC3E}">
-        <p14:creationId xmlns:p14="http://schemas.microsoft.com/office/powerpoint/2010/main" val="2784050647"/>
-      </p:ext>
-    </p:extLst>
-  </p:cSld>
-  <p:clrMapOvr>
-    <a:masterClrMapping/>
-  </p:clrMapOvr>
-</p:sld>
-</file>
-
-<file path=ppt/slides/slide20.xml><?xml version="1.0" encoding="utf-8"?>
+<file path=ppt/slides/slide19.xml><?xml version="1.0" encoding="utf-8"?>
 <p:sld xmlns:a="http://schemas.openxmlformats.org/drawingml/2006/main" xmlns:r="http://schemas.openxmlformats.org/officeDocument/2006/relationships" xmlns:p="http://schemas.openxmlformats.org/presentationml/2006/main">
   <p:cSld>
     <p:spTree>
@@ -8487,6 +8208,164 @@
     <p:extLst>
       <p:ext uri="{BB962C8B-B14F-4D97-AF65-F5344CB8AC3E}">
         <p14:creationId xmlns:p14="http://schemas.microsoft.com/office/powerpoint/2010/main" val="1675890419"/>
+      </p:ext>
+    </p:extLst>
+  </p:cSld>
+  <p:clrMapOvr>
+    <a:masterClrMapping/>
+  </p:clrMapOvr>
+</p:sld>
+</file>
+
+<file path=ppt/slides/slide2.xml><?xml version="1.0" encoding="utf-8"?>
+<p:sld xmlns:a="http://schemas.openxmlformats.org/drawingml/2006/main" xmlns:r="http://schemas.openxmlformats.org/officeDocument/2006/relationships" xmlns:p="http://schemas.openxmlformats.org/presentationml/2006/main">
+  <p:cSld>
+    <p:spTree>
+      <p:nvGrpSpPr>
+        <p:cNvPr id="1" name=""/>
+        <p:cNvGrpSpPr/>
+        <p:nvPr/>
+      </p:nvGrpSpPr>
+      <p:grpSpPr>
+        <a:xfrm>
+          <a:off x="0" y="0"/>
+          <a:ext cx="0" cy="0"/>
+          <a:chOff x="0" y="0"/>
+          <a:chExt cx="0" cy="0"/>
+        </a:xfrm>
+      </p:grpSpPr>
+      <p:sp>
+        <p:nvSpPr>
+          <p:cNvPr id="2" name="Заголовок 1"/>
+          <p:cNvSpPr>
+            <a:spLocks noGrp="1"/>
+          </p:cNvSpPr>
+          <p:nvPr>
+            <p:ph type="title"/>
+          </p:nvPr>
+        </p:nvSpPr>
+        <p:spPr>
+          <a:xfrm>
+            <a:off x="1006839" y="208649"/>
+            <a:ext cx="10178322" cy="696607"/>
+          </a:xfrm>
+        </p:spPr>
+        <p:txBody>
+          <a:bodyPr>
+            <a:normAutofit fontScale="90000"/>
+          </a:bodyPr>
+          <a:lstStyle/>
+          <a:p>
+            <a:r>
+              <a:rPr lang="ru-RU" sz="3200" dirty="0"/>
+              <a:t>ЛАБОРАТОРНАЯ №1</a:t>
+            </a:r>
+            <a:br>
+              <a:rPr lang="ru-RU" sz="3200" dirty="0"/>
+            </a:br>
+            <a:endParaRPr lang="ru-RU" sz="3200" dirty="0"/>
+          </a:p>
+        </p:txBody>
+      </p:sp>
+      <p:sp>
+        <p:nvSpPr>
+          <p:cNvPr id="3" name="TextBox 2">
+            <a:extLst>
+              <a:ext uri="{FF2B5EF4-FFF2-40B4-BE49-F238E27FC236}">
+                <a16:creationId xmlns:a16="http://schemas.microsoft.com/office/drawing/2014/main" id="{1FF9C8B5-E65A-AC95-74D0-8D96BC5C953F}"/>
+              </a:ext>
+            </a:extLst>
+          </p:cNvPr>
+          <p:cNvSpPr txBox="1"/>
+          <p:nvPr/>
+        </p:nvSpPr>
+        <p:spPr>
+          <a:xfrm>
+            <a:off x="3183685" y="868743"/>
+            <a:ext cx="7167716" cy="538609"/>
+          </a:xfrm>
+          <a:prstGeom prst="rect">
+            <a:avLst/>
+          </a:prstGeom>
+          <a:noFill/>
+        </p:spPr>
+        <p:txBody>
+          <a:bodyPr wrap="square" rtlCol="0">
+            <a:spAutoFit/>
+          </a:bodyPr>
+          <a:lstStyle/>
+          <a:p>
+            <a:r>
+              <a:rPr lang="ru-RU" sz="2900" dirty="0">
+                <a:solidFill>
+                  <a:schemeClr val="tx2"/>
+                </a:solidFill>
+                <a:latin typeface="+mj-lt"/>
+              </a:rPr>
+              <a:t>Диаграмма модели предметной области</a:t>
+            </a:r>
+          </a:p>
+        </p:txBody>
+      </p:sp>
+      <p:sp>
+        <p:nvSpPr>
+          <p:cNvPr id="6" name="Объект 5">
+            <a:extLst>
+              <a:ext uri="{FF2B5EF4-FFF2-40B4-BE49-F238E27FC236}">
+                <a16:creationId xmlns:a16="http://schemas.microsoft.com/office/drawing/2014/main" id="{B18EEEB2-AE78-BC4F-CDEF-2C67C7F2C86C}"/>
+              </a:ext>
+            </a:extLst>
+          </p:cNvPr>
+          <p:cNvSpPr>
+            <a:spLocks noGrp="1"/>
+          </p:cNvSpPr>
+          <p:nvPr>
+            <p:ph idx="1"/>
+          </p:nvPr>
+        </p:nvSpPr>
+        <p:spPr/>
+        <p:txBody>
+          <a:bodyPr/>
+          <a:lstStyle/>
+          <a:p>
+            <a:endParaRPr lang="ru-RU"/>
+          </a:p>
+        </p:txBody>
+      </p:sp>
+      <p:pic>
+        <p:nvPicPr>
+          <p:cNvPr id="8" name="Рисунок 7">
+            <a:extLst>
+              <a:ext uri="{FF2B5EF4-FFF2-40B4-BE49-F238E27FC236}">
+                <a16:creationId xmlns:a16="http://schemas.microsoft.com/office/drawing/2014/main" id="{783AC3D1-2754-5C48-2CA9-8971B2B5E4BE}"/>
+              </a:ext>
+            </a:extLst>
+          </p:cNvPr>
+          <p:cNvPicPr>
+            <a:picLocks noChangeAspect="1"/>
+          </p:cNvPicPr>
+          <p:nvPr/>
+        </p:nvPicPr>
+        <p:blipFill>
+          <a:blip r:embed="rId2"/>
+          <a:stretch>
+            <a:fillRect/>
+          </a:stretch>
+        </p:blipFill>
+        <p:spPr>
+          <a:xfrm>
+            <a:off x="1663411" y="1407352"/>
+            <a:ext cx="9354856" cy="5010849"/>
+          </a:xfrm>
+          <a:prstGeom prst="rect">
+            <a:avLst/>
+          </a:prstGeom>
+        </p:spPr>
+      </p:pic>
+    </p:spTree>
+    <p:extLst>
+      <p:ext uri="{BB962C8B-B14F-4D97-AF65-F5344CB8AC3E}">
+        <p14:creationId xmlns:p14="http://schemas.microsoft.com/office/powerpoint/2010/main" val="2784050647"/>
       </p:ext>
     </p:extLst>
   </p:cSld>
@@ -9144,11 +9023,15 @@
             </a:br>
             <a:r>
               <a:rPr lang="ru-RU" sz="3200" dirty="0"/>
-              <a:t>(для </a:t>
+              <a:t>(Конкуренты </a:t>
+            </a:r>
+            <a:r>
+              <a:rPr lang="en-US" sz="3200" dirty="0"/>
+              <a:t>Master dental, </a:t>
             </a:r>
             <a:r>
               <a:rPr lang="en-US" sz="3200" dirty="0" err="1"/>
-              <a:t>master.dental</a:t>
+              <a:t>VSmail</a:t>
             </a:r>
             <a:r>
               <a:rPr lang="ru-RU" sz="3200" dirty="0"/>
@@ -9227,9 +9110,39 @@
         </p:blipFill>
         <p:spPr>
           <a:xfrm>
-            <a:off x="1693631" y="2063074"/>
-            <a:ext cx="8804737" cy="4355635"/>
+            <a:off x="-1" y="2115187"/>
+            <a:ext cx="6061011" cy="4355635"/>
           </a:xfrm>
+        </p:spPr>
+      </p:pic>
+      <p:pic>
+        <p:nvPicPr>
+          <p:cNvPr id="5" name="Рисунок 4">
+            <a:extLst>
+              <a:ext uri="{FF2B5EF4-FFF2-40B4-BE49-F238E27FC236}">
+                <a16:creationId xmlns:a16="http://schemas.microsoft.com/office/drawing/2014/main" id="{12766A75-74F1-4B21-B959-89A196DD839E}"/>
+              </a:ext>
+            </a:extLst>
+          </p:cNvPr>
+          <p:cNvPicPr>
+            <a:picLocks noChangeAspect="1"/>
+          </p:cNvPicPr>
+          <p:nvPr/>
+        </p:nvPicPr>
+        <p:blipFill>
+          <a:blip r:embed="rId3"/>
+          <a:stretch>
+            <a:fillRect/>
+          </a:stretch>
+        </p:blipFill>
+        <p:spPr>
+          <a:xfrm>
+            <a:off x="6061011" y="1947577"/>
+            <a:ext cx="6130989" cy="4523245"/>
+          </a:xfrm>
+          <a:prstGeom prst="rect">
+            <a:avLst/>
+          </a:prstGeom>
         </p:spPr>
       </p:pic>
     </p:spTree>
@@ -9274,8 +9187,8 @@
         </p:nvSpPr>
         <p:spPr>
           <a:xfrm>
-            <a:off x="1251678" y="217793"/>
-            <a:ext cx="10178322" cy="687463"/>
+            <a:off x="1251678" y="207665"/>
+            <a:ext cx="10178322" cy="605167"/>
           </a:xfrm>
         </p:spPr>
         <p:txBody>
@@ -9286,41 +9199,29 @@
           <a:p>
             <a:pPr algn="ctr"/>
             <a:r>
+              <a:rPr lang="ru-RU" sz="3200" dirty="0" err="1"/>
+              <a:t>ДиаграммА</a:t>
+            </a:r>
+            <a:r>
               <a:rPr lang="ru-RU" sz="3200" dirty="0"/>
-              <a:t>Диаграмма вариантов использования</a:t>
+              <a:t> вариантов использования</a:t>
             </a:r>
             <a:br>
               <a:rPr lang="ru-RU" sz="3200" dirty="0"/>
             </a:br>
             <a:r>
               <a:rPr lang="ru-RU" sz="3200" dirty="0"/>
-              <a:t>(для </a:t>
-            </a:r>
-            <a:r>
-              <a:rPr lang="en-US" sz="3200" dirty="0" err="1"/>
-              <a:t>Viniry</a:t>
-            </a:r>
-            <a:r>
-              <a:rPr lang="en-US" sz="3200" dirty="0"/>
-              <a:t>-v-</a:t>
-            </a:r>
-            <a:r>
-              <a:rPr lang="en-US" sz="3200" dirty="0" err="1"/>
-              <a:t>msmile</a:t>
-            </a:r>
-            <a:r>
-              <a:rPr lang="ru-RU" sz="3200" dirty="0"/>
-              <a:t>)</a:t>
-            </a:r>
-          </a:p>
-        </p:txBody>
-      </p:sp>
-      <p:sp>
-        <p:nvSpPr>
-          <p:cNvPr id="4" name="Объект 3">
+              <a:t>(для стоматологии «улыбка»)</a:t>
+            </a:r>
+          </a:p>
+        </p:txBody>
+      </p:sp>
+      <p:sp>
+        <p:nvSpPr>
+          <p:cNvPr id="5" name="Объект 4">
             <a:extLst>
               <a:ext uri="{FF2B5EF4-FFF2-40B4-BE49-F238E27FC236}">
-                <a16:creationId xmlns:a16="http://schemas.microsoft.com/office/drawing/2014/main" id="{24731773-6744-7B67-BE6E-739B2221C947}"/>
+                <a16:creationId xmlns:a16="http://schemas.microsoft.com/office/drawing/2014/main" id="{4A766661-C17E-534F-19C9-E8A7DC96E63A}"/>
               </a:ext>
             </a:extLst>
           </p:cNvPr>
@@ -9342,10 +9243,10 @@
       </p:sp>
       <p:pic>
         <p:nvPicPr>
-          <p:cNvPr id="6" name="Рисунок 5">
+          <p:cNvPr id="7" name="Рисунок 6">
             <a:extLst>
               <a:ext uri="{FF2B5EF4-FFF2-40B4-BE49-F238E27FC236}">
-                <a16:creationId xmlns:a16="http://schemas.microsoft.com/office/drawing/2014/main" id="{C633E88B-0ED9-FB64-81F4-A5D1ABEFB69D}"/>
+                <a16:creationId xmlns:a16="http://schemas.microsoft.com/office/drawing/2014/main" id="{5042054F-3244-D456-E693-A030915CD542}"/>
               </a:ext>
             </a:extLst>
           </p:cNvPr>
@@ -9362,8 +9263,8 @@
         </p:blipFill>
         <p:spPr>
           <a:xfrm>
-            <a:off x="2562622" y="1140541"/>
-            <a:ext cx="7556433" cy="5574891"/>
+            <a:off x="1524210" y="1339005"/>
+            <a:ext cx="9633257" cy="5061795"/>
           </a:xfrm>
           <a:prstGeom prst="rect">
             <a:avLst/>
@@ -9373,7 +9274,7 @@
     </p:spTree>
     <p:extLst>
       <p:ext uri="{BB962C8B-B14F-4D97-AF65-F5344CB8AC3E}">
-        <p14:creationId xmlns:p14="http://schemas.microsoft.com/office/powerpoint/2010/main" val="3335835053"/>
+        <p14:creationId xmlns:p14="http://schemas.microsoft.com/office/powerpoint/2010/main" val="556189797"/>
       </p:ext>
     </p:extLst>
   </p:cSld>
